--- a/briefing.pptx
+++ b/briefing.pptx
@@ -9,7 +9,7 @@
     <p:sldId id="257" r:id="rId8"/>
     <p:sldId id="258" r:id="rId9"/>
   </p:sldIdLst>
-  <p:sldSz cx="9144000" cy="5143500" type="screen4x3"/>
+  <p:sldSz cx="12191695" cy="6858000" type="screen4x3"/>
   <p:notesSz cx="6858000" cy="9144000"/>
   <p:defaultTextStyle>
     <a:defPPr>
@@ -3099,7 +3099,7 @@
         <p:spPr>
           <a:xfrm>
             <a:off x="914400" y="731520"/>
-            <a:ext cx="7315200" cy="1097280"/>
+            <a:ext cx="10362895" cy="1097280"/>
           </a:xfrm>
           <a:prstGeom prst="rect">
             <a:avLst/>
@@ -3113,10 +3113,10 @@
           <a:lstStyle/>
           <a:p>
             <a:pPr algn="ctr">
-              <a:defRPr sz="3600" b="1"/>
+              <a:defRPr sz="4000" b="1"/>
             </a:pPr>
             <a:r>
-              <a:t>AI+硬件协同设计愿景简报</a:t>
+              <a:t>AI+HW Co-Evolution: A Multi-Layered Vision</a:t>
             </a:r>
           </a:p>
         </p:txBody>
@@ -3129,8 +3129,8 @@
         </p:nvSpPr>
         <p:spPr>
           <a:xfrm>
-            <a:off x="914400" y="2286000"/>
-            <a:ext cx="7315200" cy="1828800"/>
+            <a:off x="914400" y="2011680"/>
+            <a:ext cx="10362895" cy="731520"/>
           </a:xfrm>
           <a:prstGeom prst="rect">
             <a:avLst/>
@@ -3138,21 +3138,20 @@
           <a:noFill/>
         </p:spPr>
         <p:txBody>
-          <a:bodyPr wrap="square">
+          <a:bodyPr wrap="none">
             <a:spAutoFit/>
           </a:bodyPr>
           <a:lstStyle/>
           <a:p>
-            <a:pPr>
-              <a:defRPr sz="2000"/>
+            <a:pPr algn="ctr">
+              <a:defRPr sz="1800">
+                <a:solidFill>
+                  <a:srgbClr val="808080"/>
+                </a:solidFill>
+              </a:defRPr>
             </a:pPr>
             <a:r>
-              <a:t>核心目标：</a:t>
-            </a:r>
-          </a:p>
-          <a:p>
-            <a:r>
-              <a:t>实现每焦耳能量下智能能力（即有意义的功能、洞察或任务性能）提升1000倍。</a:t>
+              <a:t>基于论文：AI+HV2035: Shaping the Next Decade (arXiv:2603.05225)</a:t>
             </a:r>
           </a:p>
         </p:txBody>
@@ -3165,8 +3164,8 @@
         </p:nvSpPr>
         <p:spPr>
           <a:xfrm>
-            <a:off x="914400" y="4572000"/>
-            <a:ext cx="7315200" cy="457200"/>
+            <a:off x="1371600" y="3200400"/>
+            <a:ext cx="9448495" cy="2286000"/>
           </a:xfrm>
           <a:prstGeom prst="rect">
             <a:avLst/>
@@ -3174,16 +3173,59 @@
           <a:noFill/>
         </p:spPr>
         <p:txBody>
+          <a:bodyPr wrap="square">
+            <a:spAutoFit/>
+          </a:bodyPr>
+          <a:lstStyle/>
+          <a:p>
+            <a:pPr algn="ctr">
+              <a:defRPr sz="2000" b="1"/>
+            </a:pPr>
+            <a:r>
+              <a:t>🎯 核心目标：</a:t>
+            </a:r>
+          </a:p>
+          <a:p>
+            <a:pPr algn="ctr">
+              <a:defRPr sz="1800" b="0"/>
+            </a:pPr>
+            <a:r>
+              <a:t>通过硬件创新和更高效的AI模型，在AI训练和推理效率上实现千倍提升</a:t>
+            </a:r>
+          </a:p>
+        </p:txBody>
+      </p:sp>
+      <p:sp>
+        <p:nvSpPr>
+          <p:cNvPr id="5" name="TextBox 4"/>
+          <p:cNvSpPr txBox="1"/>
+          <p:nvPr/>
+        </p:nvSpPr>
+        <p:spPr>
+          <a:xfrm>
+            <a:off x="914400" y="6217920"/>
+            <a:ext cx="10362895" cy="365760"/>
+          </a:xfrm>
+          <a:prstGeom prst="rect">
+            <a:avLst/>
+          </a:prstGeom>
+          <a:noFill/>
+        </p:spPr>
+        <p:txBody>
           <a:bodyPr wrap="none">
             <a:spAutoFit/>
           </a:bodyPr>
           <a:lstStyle/>
           <a:p>
-            <a:pPr>
-              <a:defRPr sz="1200"/>
+            <a:pPr algn="ctr">
+              <a:defRPr sz="1200">
+                <a:solidFill>
+                  <a:srgbClr val="808080"/>
+                </a:solidFill>
+              </a:defRPr>
             </a:pPr>
             <a:r>
-              <a:t>基于论文：AI+HV2035: Shaping the Next Decade (arXiv:2603.05225)</a:t>
+              <a:t>AI+硬件协同设计愿景 | 自动化简报生成器</a:t>
             </a:r>
           </a:p>
         </p:txBody>
@@ -3214,8 +3256,8 @@
         </p:nvSpPr>
         <p:spPr>
           <a:xfrm>
-            <a:off x="914400" y="457200"/>
-            <a:ext cx="7315200" cy="731520"/>
+            <a:off x="457200" y="274320"/>
+            <a:ext cx="11277295" cy="731520"/>
           </a:xfrm>
           <a:prstGeom prst="rect">
             <a:avLst/>
@@ -3228,8 +3270,8 @@
           </a:bodyPr>
           <a:lstStyle/>
           <a:p>
-            <a:pPr>
-              <a:defRPr sz="2800" b="1"/>
+            <a:pPr algn="ctr">
+              <a:defRPr sz="3200" b="1"/>
             </a:pPr>
             <a:r>
               <a:t>三大协同设计层级</a:t>
@@ -3246,8 +3288,8 @@
           <p:nvPr/>
         </p:nvGraphicFramePr>
         <p:xfrm>
-          <a:off x="1371600" y="1645920"/>
-          <a:ext cx="6400800" cy="2286000"/>
+          <a:off x="1371600" y="1371600"/>
+          <a:ext cx="9448495" cy="4114800"/>
         </p:xfrm>
         <a:graphic>
           <a:graphicData uri="http://schemas.openxmlformats.org/drawingml/2006/table">
@@ -3256,10 +3298,10 @@
                 <a:tableStyleId>{5C22544A-7EE6-4342-B048-85BDC9FD1C3A}</a:tableStyleId>
               </a:tblPr>
               <a:tblGrid>
-                <a:gridCol w="2286000"/>
-                <a:gridCol w="4114800"/>
+                <a:gridCol w="3200400"/>
+                <a:gridCol w="6248095"/>
               </a:tblGrid>
-              <a:tr h="571500">
+              <a:tr h="1028700">
                 <a:tc>
                   <a:txBody>
                     <a:bodyPr/>
@@ -3270,7 +3312,11 @@
                       </a:r>
                     </a:p>
                   </a:txBody>
-                  <a:tcPr/>
+                  <a:tcPr>
+                    <a:solidFill>
+                      <a:srgbClr val="0070C0"/>
+                    </a:solidFill>
+                  </a:tcPr>
                 </a:tc>
                 <a:tc>
                   <a:txBody>
@@ -3282,85 +3328,131 @@
                       </a:r>
                     </a:p>
                   </a:txBody>
-                  <a:tcPr/>
+                  <a:tcPr>
+                    <a:solidFill>
+                      <a:srgbClr val="0070C0"/>
+                    </a:solidFill>
+                  </a:tcPr>
                 </a:tc>
               </a:tr>
-              <a:tr h="571500">
+              <a:tr h="1028700">
                 <a:tc>
                   <a:txBody>
                     <a:bodyPr/>
                     <a:lstStyle/>
                     <a:p>
+                      <a:pPr>
+                        <a:defRPr sz="1600"/>
+                      </a:pPr>
                       <a:r>
-                        <a:t>Hardware Layer</a:t>
+                        <a:t>Hardware</a:t>
                       </a:r>
                     </a:p>
                   </a:txBody>
-                  <a:tcPr/>
+                  <a:tcPr>
+                    <a:solidFill>
+                      <a:srgbClr val="F0F0F0"/>
+                    </a:solidFill>
+                  </a:tcPr>
                 </a:tc>
                 <a:tc>
                   <a:txBody>
                     <a:bodyPr/>
                     <a:lstStyle/>
                     <a:p>
+                      <a:pPr>
+                        <a:defRPr sz="1600"/>
+                      </a:pPr>
                       <a:r>
-                        <a:t>包括存储与计算融合的3D集成</a:t>
+                        <a:t>需要激进创新，包括内存中心架构、3D单片集成、存内计算和模拟AI加速器，以及光电互连、AI优化拓扑；同时强调AI驱动的电子设计自动化。</a:t>
                       </a:r>
                     </a:p>
                   </a:txBody>
-                  <a:tcPr/>
+                  <a:tcPr>
+                    <a:solidFill>
+                      <a:srgbClr val="F0F0F0"/>
+                    </a:solidFill>
+                  </a:tcPr>
                 </a:tc>
               </a:tr>
-              <a:tr h="571500">
+              <a:tr h="1028700">
                 <a:tc>
                   <a:txBody>
                     <a:bodyPr/>
                     <a:lstStyle/>
                     <a:p>
+                      <a:pPr>
+                        <a:defRPr sz="1600"/>
+                      </a:pPr>
                       <a:r>
-                        <a:t>Algorithm Layer</a:t>
+                        <a:t>Algorithm</a:t>
                       </a:r>
                     </a:p>
                   </a:txBody>
-                  <a:tcPr/>
+                  <a:tcPr>
+                    <a:solidFill>
+                      <a:srgbClr val="F0F0F0"/>
+                    </a:solidFill>
+                  </a:tcPr>
                 </a:tc>
                 <a:tc>
                   <a:txBody>
                     <a:bodyPr/>
                     <a:lstStyle/>
                     <a:p>
+                      <a:pPr>
+                        <a:defRPr sz="1600"/>
+                      </a:pPr>
                       <a:r>
-                        <a:t>低复杂度、高精度、硬件感知模型</a:t>
+                        <a:t>AI必须具有硬件感知能力，硬件变得AI自适应；通过AI-in-the-loop设计自动化、硬件感知训练（低精度、稀疏性等）以及可微分模拟器、神经架构搜索、强化学习调优等方法实现自演进。</a:t>
                       </a:r>
                     </a:p>
                   </a:txBody>
-                  <a:tcPr/>
+                  <a:tcPr>
+                    <a:solidFill>
+                      <a:srgbClr val="F0F0F0"/>
+                    </a:solidFill>
+                  </a:tcPr>
                 </a:tc>
               </a:tr>
-              <a:tr h="571500">
+              <a:tr h="1028700">
                 <a:tc>
                   <a:txBody>
                     <a:bodyPr/>
                     <a:lstStyle/>
                     <a:p>
+                      <a:pPr>
+                        <a:defRPr sz="1600"/>
+                      </a:pPr>
                       <a:r>
-                        <a:t>Application Layer</a:t>
+                        <a:t>Application</a:t>
                       </a:r>
                     </a:p>
                   </a:txBody>
-                  <a:tcPr/>
+                  <a:tcPr>
+                    <a:solidFill>
+                      <a:srgbClr val="F0F0F0"/>
+                    </a:solidFill>
+                  </a:tcPr>
                 </a:tc>
                 <a:tc>
                   <a:txBody>
                     <a:bodyPr/>
                     <a:lstStyle/>
                     <a:p>
+                      <a:pPr>
+                        <a:defRPr sz="1600"/>
+                      </a:pPr>
                       <a:r>
-                        <a:t>跨云、边缘和物理环境的智能系统</a:t>
+                        <a:t>AI系统必须服务于人类和地球需求，同时保持计算可持续性；应用涵盖生产力、医疗、材料、教育、交通、经济、国家安全等领域，需应对计算需求和能源消耗的挑战。</a:t>
                       </a:r>
                     </a:p>
                   </a:txBody>
-                  <a:tcPr/>
+                  <a:tcPr>
+                    <a:solidFill>
+                      <a:srgbClr val="F0F0F0"/>
+                    </a:solidFill>
+                  </a:tcPr>
                 </a:tc>
               </a:tr>
             </a:tbl>
@@ -3393,8 +3485,8 @@
         </p:nvSpPr>
         <p:spPr>
           <a:xfrm>
-            <a:off x="914400" y="457200"/>
-            <a:ext cx="7315200" cy="731520"/>
+            <a:off x="457200" y="274320"/>
+            <a:ext cx="11277295" cy="731520"/>
           </a:xfrm>
           <a:prstGeom prst="rect">
             <a:avLst/>
@@ -3407,8 +3499,8 @@
           </a:bodyPr>
           <a:lstStyle/>
           <a:p>
-            <a:pPr>
-              <a:defRPr sz="2800" b="1"/>
+            <a:pPr algn="ctr">
+              <a:defRPr sz="3200" b="1"/>
             </a:pPr>
             <a:r>
               <a:t>技术发展时间轴</a:t>
@@ -3424,8 +3516,8 @@
         </p:nvSpPr>
         <p:spPr>
           <a:xfrm>
-            <a:off x="914400" y="1645920"/>
-            <a:ext cx="3657600" cy="2286000"/>
+            <a:off x="731520" y="1645920"/>
+            <a:ext cx="4114800" cy="3657600"/>
           </a:xfrm>
           <a:prstGeom prst="rect">
             <a:avLst/>
@@ -3439,39 +3531,117 @@
           <a:lstStyle/>
           <a:p>
             <a:pPr>
-              <a:defRPr sz="1800"/>
+              <a:defRPr sz="2200" b="1">
+                <a:solidFill>
+                  <a:srgbClr val="0070C0"/>
+                </a:solidFill>
+              </a:defRPr>
             </a:pPr>
             <a:r>
-              <a:t>近期（2-5年）</a:t>
-            </a:r>
-          </a:p>
-          <a:p>
-            <a:r>
-              <a:t>• 3D集成</a:t>
-            </a:r>
-          </a:p>
-          <a:p>
-            <a:r>
-              <a:t>• 低精度训练</a:t>
-            </a:r>
-          </a:p>
-          <a:p>
-            <a:r>
-              <a:t>• 存内计算</a:t>
-            </a:r>
-          </a:p>
-        </p:txBody>
-      </p:sp>
-      <p:sp>
-        <p:nvSpPr>
-          <p:cNvPr id="4" name="TextBox 3"/>
+              <a:t>📌 近期（2-5年）</a:t>
+            </a:r>
+          </a:p>
+          <a:p>
+            <a:pPr>
+              <a:spcAft>
+                <a:spcPts val="800"/>
+              </a:spcAft>
+              <a:defRPr sz="1600"/>
+            </a:pPr>
+            <a:r>
+              <a:t>  • 内存中心架构</a:t>
+            </a:r>
+          </a:p>
+          <a:p>
+            <a:pPr>
+              <a:spcAft>
+                <a:spcPts val="800"/>
+              </a:spcAft>
+              <a:defRPr sz="1600"/>
+            </a:pPr>
+            <a:r>
+              <a:t>  • 3D集成</a:t>
+            </a:r>
+          </a:p>
+          <a:p>
+            <a:pPr>
+              <a:spcAft>
+                <a:spcPts val="800"/>
+              </a:spcAft>
+              <a:defRPr sz="1600"/>
+            </a:pPr>
+            <a:r>
+              <a:t>  • 存内计算</a:t>
+            </a:r>
+          </a:p>
+          <a:p>
+            <a:pPr>
+              <a:spcAft>
+                <a:spcPts val="800"/>
+              </a:spcAft>
+              <a:defRPr sz="1600"/>
+            </a:pPr>
+            <a:r>
+              <a:t>  • AI驱动的EDA</a:t>
+            </a:r>
+          </a:p>
+        </p:txBody>
+      </p:sp>
+      <p:sp>
+        <p:nvSpPr>
+          <p:cNvPr id="4" name="Rectangle 3"/>
+          <p:cNvSpPr/>
+          <p:nvPr/>
+        </p:nvSpPr>
+        <p:spPr>
+          <a:xfrm>
+            <a:off x="5303520" y="1828800"/>
+            <a:ext cx="36576" cy="3200400"/>
+          </a:xfrm>
+          <a:prstGeom prst="rect">
+            <a:avLst/>
+          </a:prstGeom>
+          <a:solidFill>
+            <a:srgbClr val="C8C8C8"/>
+          </a:solidFill>
+          <a:ln>
+            <a:solidFill>
+              <a:srgbClr val="C8C8C8"/>
+            </a:solidFill>
+          </a:ln>
+        </p:spPr>
+        <p:style>
+          <a:lnRef idx="1">
+            <a:schemeClr val="accent1"/>
+          </a:lnRef>
+          <a:fillRef idx="3">
+            <a:schemeClr val="accent1"/>
+          </a:fillRef>
+          <a:effectRef idx="2">
+            <a:schemeClr val="accent1"/>
+          </a:effectRef>
+          <a:fontRef idx="minor">
+            <a:schemeClr val="lt1"/>
+          </a:fontRef>
+        </p:style>
+        <p:txBody>
+          <a:bodyPr rtlCol="0" anchor="ctr"/>
+          <a:lstStyle/>
+          <a:p>
+            <a:pPr algn="ctr"/>
+          </a:p>
+        </p:txBody>
+      </p:sp>
+      <p:sp>
+        <p:nvSpPr>
+          <p:cNvPr id="5" name="TextBox 4"/>
           <p:cNvSpPr txBox="1"/>
           <p:nvPr/>
         </p:nvSpPr>
         <p:spPr>
           <a:xfrm>
-            <a:off x="5029200" y="1645920"/>
-            <a:ext cx="3657600" cy="2286000"/>
+            <a:off x="6400800" y="1645920"/>
+            <a:ext cx="4114800" cy="3657600"/>
           </a:xfrm>
           <a:prstGeom prst="rect">
             <a:avLst/>
@@ -3485,26 +3655,194 @@
           <a:lstStyle/>
           <a:p>
             <a:pPr>
-              <a:defRPr sz="1800"/>
+              <a:defRPr sz="2200" b="1">
+                <a:solidFill>
+                  <a:srgbClr val="ED7D31"/>
+                </a:solidFill>
+              </a:defRPr>
             </a:pPr>
             <a:r>
-              <a:t>远期（6-10年）</a:t>
-            </a:r>
-          </a:p>
-          <a:p>
-            <a:r>
-              <a:t>• 光子计算</a:t>
-            </a:r>
-          </a:p>
-          <a:p>
-            <a:r>
-              <a:t>• 神经形态处理器</a:t>
-            </a:r>
-          </a:p>
-          <a:p>
-            <a:r>
-              <a:t>• 自优化系统</a:t>
-            </a:r>
+              <a:t>🚀 远期（6-10年）</a:t>
+            </a:r>
+          </a:p>
+          <a:p>
+            <a:pPr>
+              <a:spcAft>
+                <a:spcPts val="800"/>
+              </a:spcAft>
+              <a:defRPr sz="1600"/>
+            </a:pPr>
+            <a:r>
+              <a:t>  • 光子/光电子互连</a:t>
+            </a:r>
+          </a:p>
+          <a:p>
+            <a:pPr>
+              <a:spcAft>
+                <a:spcPts val="800"/>
+              </a:spcAft>
+              <a:defRPr sz="1600"/>
+            </a:pPr>
+            <a:r>
+              <a:t>  • 量子-经典混合系统</a:t>
+            </a:r>
+          </a:p>
+          <a:p>
+            <a:pPr>
+              <a:spcAft>
+                <a:spcPts val="800"/>
+              </a:spcAft>
+              <a:defRPr sz="1600"/>
+            </a:pPr>
+            <a:r>
+              <a:t>  • 自演进计算栈</a:t>
+            </a:r>
+          </a:p>
+          <a:p>
+            <a:pPr>
+              <a:spcAft>
+                <a:spcPts val="800"/>
+              </a:spcAft>
+              <a:defRPr sz="1600"/>
+            </a:pPr>
+            <a:r>
+              <a:t>  • 物理感知学习（如JEPA）</a:t>
+            </a:r>
+          </a:p>
+        </p:txBody>
+      </p:sp>
+      <p:sp>
+        <p:nvSpPr>
+          <p:cNvPr id="6" name="Rectangle 5"/>
+          <p:cNvSpPr/>
+          <p:nvPr/>
+        </p:nvSpPr>
+        <p:spPr>
+          <a:xfrm>
+            <a:off x="731520" y="5669280"/>
+            <a:ext cx="10728655" cy="36576"/>
+          </a:xfrm>
+          <a:prstGeom prst="rect">
+            <a:avLst/>
+          </a:prstGeom>
+          <a:solidFill>
+            <a:srgbClr val="C8C8C8"/>
+          </a:solidFill>
+          <a:ln>
+            <a:solidFill>
+              <a:srgbClr val="C8C8C8"/>
+            </a:solidFill>
+          </a:ln>
+        </p:spPr>
+        <p:style>
+          <a:lnRef idx="1">
+            <a:schemeClr val="accent1"/>
+          </a:lnRef>
+          <a:fillRef idx="3">
+            <a:schemeClr val="accent1"/>
+          </a:fillRef>
+          <a:effectRef idx="2">
+            <a:schemeClr val="accent1"/>
+          </a:effectRef>
+          <a:fontRef idx="minor">
+            <a:schemeClr val="lt1"/>
+          </a:fontRef>
+        </p:style>
+        <p:txBody>
+          <a:bodyPr rtlCol="0" anchor="ctr"/>
+          <a:lstStyle/>
+          <a:p>
+            <a:pPr algn="ctr"/>
+          </a:p>
+        </p:txBody>
+      </p:sp>
+      <p:sp>
+        <p:nvSpPr>
+          <p:cNvPr id="7" name="Rectangle 6"/>
+          <p:cNvSpPr/>
+          <p:nvPr/>
+        </p:nvSpPr>
+        <p:spPr>
+          <a:xfrm>
+            <a:off x="731520" y="5486400"/>
+            <a:ext cx="274320" cy="274320"/>
+          </a:xfrm>
+          <a:prstGeom prst="rect">
+            <a:avLst/>
+          </a:prstGeom>
+          <a:solidFill>
+            <a:srgbClr val="0070C0"/>
+          </a:solidFill>
+          <a:ln>
+            <a:solidFill>
+              <a:srgbClr val="0070C0"/>
+            </a:solidFill>
+          </a:ln>
+        </p:spPr>
+        <p:style>
+          <a:lnRef idx="1">
+            <a:schemeClr val="accent1"/>
+          </a:lnRef>
+          <a:fillRef idx="3">
+            <a:schemeClr val="accent1"/>
+          </a:fillRef>
+          <a:effectRef idx="2">
+            <a:schemeClr val="accent1"/>
+          </a:effectRef>
+          <a:fontRef idx="minor">
+            <a:schemeClr val="lt1"/>
+          </a:fontRef>
+        </p:style>
+        <p:txBody>
+          <a:bodyPr rtlCol="0" anchor="ctr"/>
+          <a:lstStyle/>
+          <a:p>
+            <a:pPr algn="ctr"/>
+          </a:p>
+        </p:txBody>
+      </p:sp>
+      <p:sp>
+        <p:nvSpPr>
+          <p:cNvPr id="8" name="Rectangle 7"/>
+          <p:cNvSpPr/>
+          <p:nvPr/>
+        </p:nvSpPr>
+        <p:spPr>
+          <a:xfrm>
+            <a:off x="11155680" y="5486400"/>
+            <a:ext cx="274320" cy="274320"/>
+          </a:xfrm>
+          <a:prstGeom prst="rect">
+            <a:avLst/>
+          </a:prstGeom>
+          <a:solidFill>
+            <a:srgbClr val="ED7D31"/>
+          </a:solidFill>
+          <a:ln>
+            <a:solidFill>
+              <a:srgbClr val="ED7D31"/>
+            </a:solidFill>
+          </a:ln>
+        </p:spPr>
+        <p:style>
+          <a:lnRef idx="1">
+            <a:schemeClr val="accent1"/>
+          </a:lnRef>
+          <a:fillRef idx="3">
+            <a:schemeClr val="accent1"/>
+          </a:fillRef>
+          <a:effectRef idx="2">
+            <a:schemeClr val="accent1"/>
+          </a:effectRef>
+          <a:fontRef idx="minor">
+            <a:schemeClr val="lt1"/>
+          </a:fontRef>
+        </p:style>
+        <p:txBody>
+          <a:bodyPr rtlCol="0" anchor="ctr"/>
+          <a:lstStyle/>
+          <a:p>
+            <a:pPr algn="ctr"/>
           </a:p>
         </p:txBody>
       </p:sp>
